--- a/@Materi Kuliah/Materi_SEM/Presentasi_SEM_Profesional_dari_HTML.pptx
+++ b/@Materi Kuliah/Materi_SEM/Presentasi_SEM_Profesional_dari_HTML.pptx
@@ -2,131 +2,36 @@
 <file path=ppt/presentation.xml><?xml version="1.0" encoding="utf-8"?>
 <p:presentation xmlns:p="http://schemas.openxmlformats.org/presentationml/2006/main">
   <p:sldMasterIdLst>
-    <p:sldMasterId xmlns:r="http://schemas.openxmlformats.org/officeDocument/2006/relationships" id="2147483648" r:id="R75d2314afadc498b"/>
+    <p:sldMasterId xmlns:r="http://schemas.openxmlformats.org/officeDocument/2006/relationships" id="2147483648" r:id="R5b51b19919bd4dbb"/>
   </p:sldMasterIdLst>
   <p:notesMasterIdLst>
-    <p:notesMasterId xmlns:r="http://schemas.openxmlformats.org/officeDocument/2006/relationships" r:id="R5f6b78bcdf204239"/>
+    <p:notesMasterId xmlns:r="http://schemas.openxmlformats.org/officeDocument/2006/relationships" r:id="Rc6ae9029b9ca4001"/>
   </p:notesMasterIdLst>
   <p:sldIdLst>
-    <p:sldId xmlns:r="http://schemas.openxmlformats.org/officeDocument/2006/relationships" id="256" r:id="R44bd4e097a9f4f8e"/>
-    <p:sldId xmlns:r="http://schemas.openxmlformats.org/officeDocument/2006/relationships" id="257" r:id="Ree04b4a85e39425a"/>
-    <p:sldId xmlns:r="http://schemas.openxmlformats.org/officeDocument/2006/relationships" id="258" r:id="R7b0a17e70012401d"/>
-    <p:sldId xmlns:r="http://schemas.openxmlformats.org/officeDocument/2006/relationships" id="259" r:id="R7ad5b03d47704266"/>
-    <p:sldId xmlns:r="http://schemas.openxmlformats.org/officeDocument/2006/relationships" id="260" r:id="R7e084fcdb734476a"/>
-    <p:sldId xmlns:r="http://schemas.openxmlformats.org/officeDocument/2006/relationships" id="261" r:id="R30e5717da83841d9"/>
-    <p:sldId xmlns:r="http://schemas.openxmlformats.org/officeDocument/2006/relationships" id="262" r:id="R09606a7de6124246"/>
-    <p:sldId xmlns:r="http://schemas.openxmlformats.org/officeDocument/2006/relationships" id="263" r:id="R977fa20c50ed4c51"/>
-    <p:sldId xmlns:r="http://schemas.openxmlformats.org/officeDocument/2006/relationships" id="264" r:id="R55715b2f1999421d"/>
-    <p:sldId xmlns:r="http://schemas.openxmlformats.org/officeDocument/2006/relationships" id="265" r:id="Ra3ca62abef05473d"/>
-    <p:sldId xmlns:r="http://schemas.openxmlformats.org/officeDocument/2006/relationships" id="266" r:id="R4e22c51cafd84e49"/>
-    <p:sldId xmlns:r="http://schemas.openxmlformats.org/officeDocument/2006/relationships" id="267" r:id="R7a023ac163114906"/>
-    <p:sldId xmlns:r="http://schemas.openxmlformats.org/officeDocument/2006/relationships" id="268" r:id="Re9ab7cce468f4302"/>
-    <p:sldId xmlns:r="http://schemas.openxmlformats.org/officeDocument/2006/relationships" id="269" r:id="R177e493b712c4585"/>
-    <p:sldId xmlns:r="http://schemas.openxmlformats.org/officeDocument/2006/relationships" id="270" r:id="Rc833f778661d47f3"/>
-    <p:sldId xmlns:r="http://schemas.openxmlformats.org/officeDocument/2006/relationships" id="271" r:id="R716c0d438bf64527"/>
-    <p:sldId xmlns:r="http://schemas.openxmlformats.org/officeDocument/2006/relationships" id="272" r:id="R93527fa744f3430f"/>
-    <p:sldId xmlns:r="http://schemas.openxmlformats.org/officeDocument/2006/relationships" id="273" r:id="Rfec3b03a1d1b456e"/>
-    <p:sldId xmlns:r="http://schemas.openxmlformats.org/officeDocument/2006/relationships" id="274" r:id="Rf879431d65974e32"/>
-    <p:sldId xmlns:r="http://schemas.openxmlformats.org/officeDocument/2006/relationships" id="275" r:id="R27f6464ca29d41e7"/>
-    <p:sldId xmlns:r="http://schemas.openxmlformats.org/officeDocument/2006/relationships" id="276" r:id="R7611b2784a014f60"/>
+    <p:sldId xmlns:r="http://schemas.openxmlformats.org/officeDocument/2006/relationships" id="256" r:id="R829015f146544a24"/>
+    <p:sldId xmlns:r="http://schemas.openxmlformats.org/officeDocument/2006/relationships" id="257" r:id="R17e23451b4c04e10"/>
+    <p:sldId xmlns:r="http://schemas.openxmlformats.org/officeDocument/2006/relationships" id="258" r:id="Rfe88379936c04144"/>
+    <p:sldId xmlns:r="http://schemas.openxmlformats.org/officeDocument/2006/relationships" id="259" r:id="Rc302e2d904ac4795"/>
+    <p:sldId xmlns:r="http://schemas.openxmlformats.org/officeDocument/2006/relationships" id="260" r:id="R2e71dc00d8014f44"/>
+    <p:sldId xmlns:r="http://schemas.openxmlformats.org/officeDocument/2006/relationships" id="261" r:id="R3d06a38c53f84bfd"/>
+    <p:sldId xmlns:r="http://schemas.openxmlformats.org/officeDocument/2006/relationships" id="262" r:id="R50b9ca1738484c9e"/>
+    <p:sldId xmlns:r="http://schemas.openxmlformats.org/officeDocument/2006/relationships" id="263" r:id="R9928c682f09341b3"/>
+    <p:sldId xmlns:r="http://schemas.openxmlformats.org/officeDocument/2006/relationships" id="264" r:id="Rb3f6bcfb037241b4"/>
+    <p:sldId xmlns:r="http://schemas.openxmlformats.org/officeDocument/2006/relationships" id="265" r:id="R6245a24a15ca4b3c"/>
+    <p:sldId xmlns:r="http://schemas.openxmlformats.org/officeDocument/2006/relationships" id="266" r:id="Rdff7b057e8f5446a"/>
+    <p:sldId xmlns:r="http://schemas.openxmlformats.org/officeDocument/2006/relationships" id="267" r:id="Rec3391bfd8014d6b"/>
+    <p:sldId xmlns:r="http://schemas.openxmlformats.org/officeDocument/2006/relationships" id="268" r:id="Rd0fd60996f5d4167"/>
+    <p:sldId xmlns:r="http://schemas.openxmlformats.org/officeDocument/2006/relationships" id="269" r:id="R33a99ed340df4125"/>
+    <p:sldId xmlns:r="http://schemas.openxmlformats.org/officeDocument/2006/relationships" id="270" r:id="R93243d5b24df4cc4"/>
+    <p:sldId xmlns:r="http://schemas.openxmlformats.org/officeDocument/2006/relationships" id="271" r:id="R25f00669dc844067"/>
+    <p:sldId xmlns:r="http://schemas.openxmlformats.org/officeDocument/2006/relationships" id="272" r:id="R2ac95195948644f0"/>
+    <p:sldId xmlns:r="http://schemas.openxmlformats.org/officeDocument/2006/relationships" id="273" r:id="R810105a68de74c16"/>
+    <p:sldId xmlns:r="http://schemas.openxmlformats.org/officeDocument/2006/relationships" id="274" r:id="Rb215c51dd4364982"/>
+    <p:sldId xmlns:r="http://schemas.openxmlformats.org/officeDocument/2006/relationships" id="275" r:id="R8400199bf7874cb3"/>
+    <p:sldId xmlns:r="http://schemas.openxmlformats.org/officeDocument/2006/relationships" id="276" r:id="R6b8c94eee4f544ff"/>
   </p:sldIdLst>
   <p:sldSz cx="12192000" cy="6858000"/>
   <p:notesSz cx="6858000" cy="9144000"/>
-  <p:defaultTextStyle>
-    <a:defPPr xmlns:a="http://schemas.openxmlformats.org/drawingml/2006/main">
-      <a:defRPr lang="en-US"/>
-    </a:defPPr>
-    <a:lvl1pPr xmlns:a="http://schemas.openxmlformats.org/drawingml/2006/main" marL="0" indent="0" algn="l" defTabSz="914400">
-      <a:defRPr sz="1800" kern="1200">
-        <a:solidFill>
-          <a:schemeClr val="tx1"/>
-        </a:solidFill>
-        <a:latin typeface="+mn-lt"/>
-        <a:ea typeface="+mn-ea"/>
-        <a:cs typeface="+mn-cs"/>
-      </a:defRPr>
-    </a:lvl1pPr>
-    <a:lvl2pPr xmlns:a="http://schemas.openxmlformats.org/drawingml/2006/main" marL="457200" indent="0" algn="l" defTabSz="914400">
-      <a:defRPr sz="1800" kern="1200">
-        <a:solidFill>
-          <a:schemeClr val="tx1"/>
-        </a:solidFill>
-        <a:latin typeface="+mn-lt"/>
-        <a:ea typeface="+mn-ea"/>
-        <a:cs typeface="+mn-cs"/>
-      </a:defRPr>
-    </a:lvl2pPr>
-    <a:lvl3pPr xmlns:a="http://schemas.openxmlformats.org/drawingml/2006/main" marL="914400" indent="0" algn="l" defTabSz="914400">
-      <a:defRPr sz="1800" kern="1200">
-        <a:solidFill>
-          <a:schemeClr val="tx1"/>
-        </a:solidFill>
-        <a:latin typeface="+mn-lt"/>
-        <a:ea typeface="+mn-ea"/>
-        <a:cs typeface="+mn-cs"/>
-      </a:defRPr>
-    </a:lvl3pPr>
-    <a:lvl4pPr xmlns:a="http://schemas.openxmlformats.org/drawingml/2006/main" marL="1371600" indent="0" algn="l" defTabSz="914400">
-      <a:defRPr sz="1800" kern="1200">
-        <a:solidFill>
-          <a:schemeClr val="tx1"/>
-        </a:solidFill>
-        <a:latin typeface="+mn-lt"/>
-        <a:ea typeface="+mn-ea"/>
-        <a:cs typeface="+mn-cs"/>
-      </a:defRPr>
-    </a:lvl4pPr>
-    <a:lvl5pPr xmlns:a="http://schemas.openxmlformats.org/drawingml/2006/main" marL="1828800" indent="0" algn="l" defTabSz="914400">
-      <a:defRPr sz="1800" kern="1200">
-        <a:solidFill>
-          <a:schemeClr val="tx1"/>
-        </a:solidFill>
-        <a:latin typeface="+mn-lt"/>
-        <a:ea typeface="+mn-ea"/>
-        <a:cs typeface="+mn-cs"/>
-      </a:defRPr>
-    </a:lvl5pPr>
-    <a:lvl6pPr xmlns:a="http://schemas.openxmlformats.org/drawingml/2006/main" marL="2286000" indent="0" algn="l" defTabSz="914400">
-      <a:defRPr sz="1800" kern="1200">
-        <a:solidFill>
-          <a:schemeClr val="tx1"/>
-        </a:solidFill>
-        <a:latin typeface="+mn-lt"/>
-        <a:ea typeface="+mn-ea"/>
-        <a:cs typeface="+mn-cs"/>
-      </a:defRPr>
-    </a:lvl6pPr>
-    <a:lvl7pPr xmlns:a="http://schemas.openxmlformats.org/drawingml/2006/main" marL="2743200" indent="0" algn="l" defTabSz="914400">
-      <a:defRPr sz="1800" kern="1200">
-        <a:solidFill>
-          <a:schemeClr val="tx1"/>
-        </a:solidFill>
-        <a:latin typeface="+mn-lt"/>
-        <a:ea typeface="+mn-ea"/>
-        <a:cs typeface="+mn-cs"/>
-      </a:defRPr>
-    </a:lvl7pPr>
-    <a:lvl8pPr xmlns:a="http://schemas.openxmlformats.org/drawingml/2006/main" marL="3200400" indent="0" algn="l" defTabSz="914400">
-      <a:defRPr sz="1800" kern="1200">
-        <a:solidFill>
-          <a:schemeClr val="tx1"/>
-        </a:solidFill>
-        <a:latin typeface="+mn-lt"/>
-        <a:ea typeface="+mn-ea"/>
-        <a:cs typeface="+mn-cs"/>
-      </a:defRPr>
-    </a:lvl8pPr>
-    <a:lvl9pPr xmlns:a="http://schemas.openxmlformats.org/drawingml/2006/main" marL="3657600" indent="0" algn="l" defTabSz="914400">
-      <a:defRPr sz="1800" kern="1200">
-        <a:solidFill>
-          <a:schemeClr val="tx1"/>
-        </a:solidFill>
-        <a:latin typeface="+mn-lt"/>
-        <a:ea typeface="+mn-ea"/>
-        <a:cs typeface="+mn-cs"/>
-      </a:defRPr>
-    </a:lvl9pPr>
-  </p:defaultTextStyle>
 </p:presentation>
 </file>
 
@@ -1453,7 +1358,26 @@
         <p:txBody>
           <a:bodyPr xmlns:a="http://schemas.openxmlformats.org/drawingml/2006/main"/>
           <a:lstStyle xmlns:a="http://schemas.openxmlformats.org/drawingml/2006/main"/>
-          <a:p xmlns:a="http://schemas.openxmlformats.org/drawingml/2006/main"/>
+          <a:p xmlns:a="http://schemas.openxmlformats.org/drawingml/2006/main">
+            <a:r>
+              <a:t>[Sources]</a:t>
+            </a:r>
+          </a:p>
+          <a:p xmlns:a="http://schemas.openxmlformats.org/drawingml/2006/main">
+            <a:r>
+              <a:t>- RPS mata kuliah Revisi AI 2026, Program Studi S2 Statistika Terapan FMIPA Universitas Padjadjaran.</a:t>
+            </a:r>
+          </a:p>
+          <a:p xmlns:a="http://schemas.openxmlformats.org/drawingml/2006/main">
+            <a:r>
+              <a:t>[/Sources]</a:t>
+            </a:r>
+          </a:p>
+          <a:p xmlns:a="http://schemas.openxmlformats.org/drawingml/2006/main">
+            <a:r>
+              <a:t>Penutup: CPL tetap. AI adalah akselerator ketercapaian CPMK/Sub-CPMK, bukan pengganti penalaran statistika. Tekankan kewajiban prompt log ringkas, sumber, kode/notebook reproducible, validasi, dan audit trail.</a:t>
+            </a:r>
+          </a:p>
         </p:txBody>
       </p:sp>
       <p:sp>
@@ -2010,8 +1934,8 @@
   </p:cSld>
   <p:clrMap bg1="lt1" tx1="dk1" bg2="lt2" tx2="dk2" accent1="accent1" accent2="accent2" accent3="accent3" accent4="accent4" accent5="accent5" accent6="accent6" hlink="hlink" folHlink="folHlink"/>
   <p:sldLayoutIdLst>
-    <p:sldLayoutId xmlns:r="http://schemas.openxmlformats.org/officeDocument/2006/relationships" id="2147483649" r:id="R16052a5c8c0b4ce4"/>
-    <p:sldLayoutId xmlns:r="http://schemas.openxmlformats.org/officeDocument/2006/relationships" id="2147483650" r:id="R612ef503a2744d05"/>
+    <p:sldLayoutId xmlns:r="http://schemas.openxmlformats.org/officeDocument/2006/relationships" id="2147483649" r:id="Rcd85a8b6e12745fa"/>
+    <p:sldLayoutId xmlns:r="http://schemas.openxmlformats.org/officeDocument/2006/relationships" id="2147483650" r:id="R1e6ed82ee2384a0a"/>
   </p:sldLayoutIdLst>
   <p:hf sldNum="0" hdr="0" ftr="0" dt="0"/>
   <p:txStyles>
@@ -2577,7 +2501,7 @@
           <p:nvPr/>
         </p:nvPicPr>
         <p:blipFill>
-          <a:blip xmlns:r="http://schemas.openxmlformats.org/officeDocument/2006/relationships" xmlns:a="http://schemas.openxmlformats.org/drawingml/2006/main" r:embed="R2e3152bfeaa549be"/>
+          <a:blip xmlns:r="http://schemas.openxmlformats.org/officeDocument/2006/relationships" xmlns:a="http://schemas.openxmlformats.org/drawingml/2006/main" r:embed="R795e4474b2fe4986"/>
           <a:stretch xmlns:a="http://schemas.openxmlformats.org/drawingml/2006/main">
             <a:fillRect l="0" t="0" r="0" b="0"/>
           </a:stretch>
@@ -2723,7 +2647,7 @@
           <p:nvPr/>
         </p:nvPicPr>
         <p:blipFill>
-          <a:blip xmlns:r="http://schemas.openxmlformats.org/officeDocument/2006/relationships" xmlns:a="http://schemas.openxmlformats.org/drawingml/2006/main" r:embed="Re13622fe835b42b8"/>
+          <a:blip xmlns:r="http://schemas.openxmlformats.org/officeDocument/2006/relationships" xmlns:a="http://schemas.openxmlformats.org/drawingml/2006/main" r:embed="R21a1f5a6f24949b9"/>
           <a:stretch xmlns:a="http://schemas.openxmlformats.org/drawingml/2006/main">
             <a:fillRect l="0" t="0" r="0" b="0"/>
           </a:stretch>
@@ -3345,7 +3269,7 @@
           <p:nvPr/>
         </p:nvPicPr>
         <p:blipFill>
-          <a:blip xmlns:r="http://schemas.openxmlformats.org/officeDocument/2006/relationships" xmlns:a="http://schemas.openxmlformats.org/drawingml/2006/main" r:embed="Rda437f748c514ce5"/>
+          <a:blip xmlns:r="http://schemas.openxmlformats.org/officeDocument/2006/relationships" xmlns:a="http://schemas.openxmlformats.org/drawingml/2006/main" r:embed="R942c82c4e9b04ce4"/>
           <a:stretch xmlns:a="http://schemas.openxmlformats.org/drawingml/2006/main">
             <a:fillRect l="0" t="0" r="0" b="0"/>
           </a:stretch>
@@ -5495,7 +5419,7 @@
           <p:nvPr/>
         </p:nvPicPr>
         <p:blipFill>
-          <a:blip xmlns:r="http://schemas.openxmlformats.org/officeDocument/2006/relationships" xmlns:a="http://schemas.openxmlformats.org/drawingml/2006/main" r:embed="R54a1a5751b1943d0"/>
+          <a:blip xmlns:r="http://schemas.openxmlformats.org/officeDocument/2006/relationships" xmlns:a="http://schemas.openxmlformats.org/drawingml/2006/main" r:embed="Rc96eceb710054d62"/>
           <a:stretch xmlns:a="http://schemas.openxmlformats.org/drawingml/2006/main">
             <a:fillRect l="0" t="0" r="0" b="0"/>
           </a:stretch>
@@ -5774,7 +5698,7 @@
           <p:nvPr/>
         </p:nvPicPr>
         <p:blipFill>
-          <a:blip xmlns:r="http://schemas.openxmlformats.org/officeDocument/2006/relationships" xmlns:a="http://schemas.openxmlformats.org/drawingml/2006/main" r:embed="Rd852686689ea4118"/>
+          <a:blip xmlns:r="http://schemas.openxmlformats.org/officeDocument/2006/relationships" xmlns:a="http://schemas.openxmlformats.org/drawingml/2006/main" r:embed="Rad04819df7dd49fd"/>
           <a:stretch xmlns:a="http://schemas.openxmlformats.org/drawingml/2006/main">
             <a:fillRect l="0" t="0" r="0" b="0"/>
           </a:stretch>
@@ -7308,7 +7232,7 @@
           <p:nvPr/>
         </p:nvPicPr>
         <p:blipFill>
-          <a:blip xmlns:r="http://schemas.openxmlformats.org/officeDocument/2006/relationships" xmlns:a="http://schemas.openxmlformats.org/drawingml/2006/main" r:embed="R839e23d0ae424792"/>
+          <a:blip xmlns:r="http://schemas.openxmlformats.org/officeDocument/2006/relationships" xmlns:a="http://schemas.openxmlformats.org/drawingml/2006/main" r:embed="R02053abbda9c4dd9"/>
           <a:stretch xmlns:a="http://schemas.openxmlformats.org/drawingml/2006/main">
             <a:fillRect l="0" t="0" r="0" b="0"/>
           </a:stretch>
@@ -8477,7 +8401,7 @@
           <p:nvPr/>
         </p:nvPicPr>
         <p:blipFill>
-          <a:blip xmlns:r="http://schemas.openxmlformats.org/officeDocument/2006/relationships" xmlns:a="http://schemas.openxmlformats.org/drawingml/2006/main" r:embed="Rd77e602c5f894e82"/>
+          <a:blip xmlns:r="http://schemas.openxmlformats.org/officeDocument/2006/relationships" xmlns:a="http://schemas.openxmlformats.org/drawingml/2006/main" r:embed="R933ad58484b946bc"/>
           <a:stretch xmlns:a="http://schemas.openxmlformats.org/drawingml/2006/main">
             <a:fillRect l="0" t="0" r="0" b="0"/>
           </a:stretch>
@@ -9704,7 +9628,7 @@
           <p:nvPr/>
         </p:nvPicPr>
         <p:blipFill>
-          <a:blip xmlns:r="http://schemas.openxmlformats.org/officeDocument/2006/relationships" xmlns:a="http://schemas.openxmlformats.org/drawingml/2006/main" r:embed="Rb012c258c1a54fef"/>
+          <a:blip xmlns:r="http://schemas.openxmlformats.org/officeDocument/2006/relationships" xmlns:a="http://schemas.openxmlformats.org/drawingml/2006/main" r:embed="R4658bda5f81d41bf"/>
           <a:stretch xmlns:a="http://schemas.openxmlformats.org/drawingml/2006/main">
             <a:fillRect l="0" t="0" r="0" b="0"/>
           </a:stretch>
@@ -10909,7 +10833,7 @@
           <p:nvPr/>
         </p:nvPicPr>
         <p:blipFill>
-          <a:blip xmlns:r="http://schemas.openxmlformats.org/officeDocument/2006/relationships" xmlns:a="http://schemas.openxmlformats.org/drawingml/2006/main" r:embed="R6105468bb8e841d7"/>
+          <a:blip xmlns:r="http://schemas.openxmlformats.org/officeDocument/2006/relationships" xmlns:a="http://schemas.openxmlformats.org/drawingml/2006/main" r:embed="R3784f3452e814d44"/>
           <a:stretch xmlns:a="http://schemas.openxmlformats.org/drawingml/2006/main">
             <a:fillRect l="0" t="0" r="0" b="0"/>
           </a:stretch>
@@ -11188,7 +11112,7 @@
           <p:nvPr/>
         </p:nvPicPr>
         <p:blipFill>
-          <a:blip xmlns:r="http://schemas.openxmlformats.org/officeDocument/2006/relationships" xmlns:a="http://schemas.openxmlformats.org/drawingml/2006/main" r:embed="R2496f76bd2a54fef"/>
+          <a:blip xmlns:r="http://schemas.openxmlformats.org/officeDocument/2006/relationships" xmlns:a="http://schemas.openxmlformats.org/drawingml/2006/main" r:embed="Rf37e5cfe3e4542ec"/>
           <a:stretch xmlns:a="http://schemas.openxmlformats.org/drawingml/2006/main">
             <a:fillRect l="0" t="0" r="0" b="0"/>
           </a:stretch>
@@ -12733,7 +12657,7 @@
           <p:nvPr/>
         </p:nvPicPr>
         <p:blipFill>
-          <a:blip xmlns:r="http://schemas.openxmlformats.org/officeDocument/2006/relationships" xmlns:a="http://schemas.openxmlformats.org/drawingml/2006/main" r:embed="Ra95c8667aed04089"/>
+          <a:blip xmlns:r="http://schemas.openxmlformats.org/officeDocument/2006/relationships" xmlns:a="http://schemas.openxmlformats.org/drawingml/2006/main" r:embed="R588b3398b7b14ba2"/>
           <a:stretch xmlns:a="http://schemas.openxmlformats.org/drawingml/2006/main">
             <a:fillRect l="0" t="0" r="0" b="0"/>
           </a:stretch>
@@ -14750,7 +14674,7 @@
           <p:nvPr/>
         </p:nvPicPr>
         <p:blipFill>
-          <a:blip xmlns:r="http://schemas.openxmlformats.org/officeDocument/2006/relationships" xmlns:a="http://schemas.openxmlformats.org/drawingml/2006/main" r:embed="R9ea7873b05034c60"/>
+          <a:blip xmlns:r="http://schemas.openxmlformats.org/officeDocument/2006/relationships" xmlns:a="http://schemas.openxmlformats.org/drawingml/2006/main" r:embed="Rb7336c870fdb4c3a"/>
           <a:stretch xmlns:a="http://schemas.openxmlformats.org/drawingml/2006/main">
             <a:fillRect l="0" t="0" r="0" b="0"/>
           </a:stretch>
@@ -15977,7 +15901,7 @@
           <p:nvPr/>
         </p:nvPicPr>
         <p:blipFill>
-          <a:blip xmlns:r="http://schemas.openxmlformats.org/officeDocument/2006/relationships" xmlns:a="http://schemas.openxmlformats.org/drawingml/2006/main" r:embed="Ra60345ab243f4134"/>
+          <a:blip xmlns:r="http://schemas.openxmlformats.org/officeDocument/2006/relationships" xmlns:a="http://schemas.openxmlformats.org/drawingml/2006/main" r:embed="R49fcb3e35054482f"/>
           <a:stretch xmlns:a="http://schemas.openxmlformats.org/drawingml/2006/main">
             <a:fillRect l="0" t="0" r="0" b="0"/>
           </a:stretch>
@@ -17118,7 +17042,7 @@
           <p:nvPr/>
         </p:nvPicPr>
         <p:blipFill>
-          <a:blip xmlns:r="http://schemas.openxmlformats.org/officeDocument/2006/relationships" xmlns:a="http://schemas.openxmlformats.org/drawingml/2006/main" r:embed="Rc65541deb4e54571"/>
+          <a:blip xmlns:r="http://schemas.openxmlformats.org/officeDocument/2006/relationships" xmlns:a="http://schemas.openxmlformats.org/drawingml/2006/main" r:embed="R245b21a45f2342f7"/>
           <a:stretch xmlns:a="http://schemas.openxmlformats.org/drawingml/2006/main">
             <a:fillRect l="0" t="0" r="0" b="0"/>
           </a:stretch>
@@ -18583,7 +18507,7 @@
           <p:nvPr/>
         </p:nvPicPr>
         <p:blipFill>
-          <a:blip xmlns:r="http://schemas.openxmlformats.org/officeDocument/2006/relationships" xmlns:a="http://schemas.openxmlformats.org/drawingml/2006/main" r:embed="R67f904ad57ab4346"/>
+          <a:blip xmlns:r="http://schemas.openxmlformats.org/officeDocument/2006/relationships" xmlns:a="http://schemas.openxmlformats.org/drawingml/2006/main" r:embed="R82108d1feeb841bb"/>
           <a:stretch xmlns:a="http://schemas.openxmlformats.org/drawingml/2006/main">
             <a:fillRect l="0" t="0" r="0" b="0"/>
           </a:stretch>
@@ -18729,7 +18653,7 @@
           <p:nvPr/>
         </p:nvPicPr>
         <p:blipFill>
-          <a:blip xmlns:r="http://schemas.openxmlformats.org/officeDocument/2006/relationships" xmlns:a="http://schemas.openxmlformats.org/drawingml/2006/main" r:embed="R21d1758d7cbc4214"/>
+          <a:blip xmlns:r="http://schemas.openxmlformats.org/officeDocument/2006/relationships" xmlns:a="http://schemas.openxmlformats.org/drawingml/2006/main" r:embed="Ra721bb3950004dca"/>
           <a:stretch xmlns:a="http://schemas.openxmlformats.org/drawingml/2006/main">
             <a:fillRect l="0" t="0" r="0" b="0"/>
           </a:stretch>
@@ -18833,7 +18757,7 @@
                 <a:ea typeface="Aptos Display"/>
                 <a:cs typeface="Aptos Display"/>
               </a:rPr>
-              <a:t>Dari data menuju</a:t>
+              <a:t>AI mempercepat proses,</a:t>
             </a:r>
           </a:p>
           <a:p xmlns:a="http://schemas.openxmlformats.org/drawingml/2006/main">
@@ -18849,7 +18773,7 @@
                 <a:ea typeface="Aptos Display"/>
                 <a:cs typeface="Aptos Display"/>
               </a:rPr>
-              <a:t>keputusan yang dapat diuji</a:t>
+              <a:t>penalaran tetap memimpin</a:t>
             </a:r>
           </a:p>
         </p:txBody>
@@ -18916,7 +18840,7 @@
         </p:spPr>
         <p:txBody>
           <a:bodyPr xmlns:a="http://schemas.openxmlformats.org/drawingml/2006/main" wrap="square" lIns="635" tIns="635" rIns="635" bIns="635" anchor="t">
-            <a:normAutofit fontScale="100000"/>
+            <a:normAutofit fontScale="93620"/>
           </a:bodyPr>
           <a:lstStyle xmlns:a="http://schemas.openxmlformats.org/drawingml/2006/main"/>
           <a:p xmlns:a="http://schemas.openxmlformats.org/drawingml/2006/main">
@@ -18932,7 +18856,7 @@
                 <a:ea typeface="Aptos"/>
                 <a:cs typeface="Aptos"/>
               </a:rPr>
-              <a:t>SEM menghubungkan teori, data, metode, validasi, dan komunikasi untuk menghasilkan keputusan yang sahih, dapat direplikasi, dan bertanggung jawab.</a:t>
+              <a:t>SEM memadukan teori, data, komputasi, validasi, dan komunikasi. AI mempercepat eksplorasi dan pemeriksaan awal; mahasiswa tetap memverifikasi asumsi, kode, hasil numerik, ketidakpastian, sumber, dan dampak sebelum mengambil keputusan.</a:t>
             </a:r>
           </a:p>
         </p:txBody>
@@ -19102,7 +19026,7 @@
           <p:nvPr/>
         </p:nvPicPr>
         <p:blipFill>
-          <a:blip xmlns:r="http://schemas.openxmlformats.org/officeDocument/2006/relationships" xmlns:a="http://schemas.openxmlformats.org/drawingml/2006/main" r:embed="R9d8cd74f8b1f4260"/>
+          <a:blip xmlns:r="http://schemas.openxmlformats.org/officeDocument/2006/relationships" xmlns:a="http://schemas.openxmlformats.org/drawingml/2006/main" r:embed="R03801b91b9c94500"/>
           <a:stretch xmlns:a="http://schemas.openxmlformats.org/drawingml/2006/main">
             <a:fillRect l="0" t="0" r="0" b="0"/>
           </a:stretch>
@@ -20233,7 +20157,7 @@
           <p:nvPr/>
         </p:nvPicPr>
         <p:blipFill>
-          <a:blip xmlns:r="http://schemas.openxmlformats.org/officeDocument/2006/relationships" xmlns:a="http://schemas.openxmlformats.org/drawingml/2006/main" r:embed="R55382e4cbadc4f18"/>
+          <a:blip xmlns:r="http://schemas.openxmlformats.org/officeDocument/2006/relationships" xmlns:a="http://schemas.openxmlformats.org/drawingml/2006/main" r:embed="R6a7aaae40df44d00"/>
           <a:stretch xmlns:a="http://schemas.openxmlformats.org/drawingml/2006/main">
             <a:fillRect l="0" t="0" r="0" b="0"/>
           </a:stretch>
@@ -22337,7 +22261,7 @@
           <p:nvPr/>
         </p:nvPicPr>
         <p:blipFill>
-          <a:blip xmlns:r="http://schemas.openxmlformats.org/officeDocument/2006/relationships" xmlns:a="http://schemas.openxmlformats.org/drawingml/2006/main" r:embed="Re0692c27588945a1"/>
+          <a:blip xmlns:r="http://schemas.openxmlformats.org/officeDocument/2006/relationships" xmlns:a="http://schemas.openxmlformats.org/drawingml/2006/main" r:embed="R2f5e742871aa4c18"/>
           <a:stretch xmlns:a="http://schemas.openxmlformats.org/drawingml/2006/main">
             <a:fillRect l="0" t="0" r="0" b="0"/>
           </a:stretch>
@@ -23619,7 +23543,7 @@
           <p:nvPr/>
         </p:nvPicPr>
         <p:blipFill>
-          <a:blip xmlns:r="http://schemas.openxmlformats.org/officeDocument/2006/relationships" xmlns:a="http://schemas.openxmlformats.org/drawingml/2006/main" r:embed="R1276128cab1f4e1b"/>
+          <a:blip xmlns:r="http://schemas.openxmlformats.org/officeDocument/2006/relationships" xmlns:a="http://schemas.openxmlformats.org/drawingml/2006/main" r:embed="R398e156bb08a4f1a"/>
           <a:stretch xmlns:a="http://schemas.openxmlformats.org/drawingml/2006/main">
             <a:fillRect l="0" t="0" r="0" b="0"/>
           </a:stretch>
@@ -23898,7 +23822,7 @@
           <p:nvPr/>
         </p:nvPicPr>
         <p:blipFill>
-          <a:blip xmlns:r="http://schemas.openxmlformats.org/officeDocument/2006/relationships" xmlns:a="http://schemas.openxmlformats.org/drawingml/2006/main" r:embed="R5b9a3a0d79004992"/>
+          <a:blip xmlns:r="http://schemas.openxmlformats.org/officeDocument/2006/relationships" xmlns:a="http://schemas.openxmlformats.org/drawingml/2006/main" r:embed="R9d57f1022ea84d9b"/>
           <a:stretch xmlns:a="http://schemas.openxmlformats.org/drawingml/2006/main">
             <a:fillRect l="0" t="0" r="0" b="0"/>
           </a:stretch>
@@ -25978,7 +25902,7 @@
           <p:nvPr/>
         </p:nvPicPr>
         <p:blipFill>
-          <a:blip xmlns:r="http://schemas.openxmlformats.org/officeDocument/2006/relationships" xmlns:a="http://schemas.openxmlformats.org/drawingml/2006/main" r:embed="Rc5c1e441cf1e4471"/>
+          <a:blip xmlns:r="http://schemas.openxmlformats.org/officeDocument/2006/relationships" xmlns:a="http://schemas.openxmlformats.org/drawingml/2006/main" r:embed="Ra664e520773b441b"/>
           <a:stretch xmlns:a="http://schemas.openxmlformats.org/drawingml/2006/main">
             <a:fillRect l="0" t="0" r="0" b="0"/>
           </a:stretch>
@@ -27391,7 +27315,7 @@
           <p:nvPr/>
         </p:nvPicPr>
         <p:blipFill>
-          <a:blip xmlns:r="http://schemas.openxmlformats.org/officeDocument/2006/relationships" xmlns:a="http://schemas.openxmlformats.org/drawingml/2006/main" r:embed="R8130e4b7f15c49c0"/>
+          <a:blip xmlns:r="http://schemas.openxmlformats.org/officeDocument/2006/relationships" xmlns:a="http://schemas.openxmlformats.org/drawingml/2006/main" r:embed="Rb1328dcdb18a4129"/>
           <a:stretch xmlns:a="http://schemas.openxmlformats.org/drawingml/2006/main">
             <a:fillRect l="0" t="0" r="0" b="0"/>
           </a:stretch>
